--- a/AutomaTivio/saida/2026-09/pptx/Tivio Institucional 15 - Relatório de Gestão - Setembro 2026.pptx
+++ b/AutomaTivio/saida/2026-09/pptx/Tivio Institucional 15 - Relatório de Gestão - Setembro 2026.pptx
@@ -4659,7 +4659,7 @@
         <p:spPr>
           <a:xfrm>
             <a:off x="2831928" y="5620269"/>
-            <a:ext cx="312407" cy="143640"/>
+            <a:ext cx="346068" cy="143640"/>
           </a:xfrm>
           <a:prstGeom prst="rect">
             <a:avLst/>
@@ -4682,7 +4682,7 @@
                 </a:solidFill>
                 <a:latin typeface="Versos"/>
               </a:rPr>
-              <a:t>4,11%</a:t>
+              <a:t>5,10%</a:t>
             </a:r>
           </a:p>
         </p:txBody>
@@ -4732,7 +4732,7 @@
         </p:nvSpPr>
         <p:spPr>
           <a:xfrm>
-            <a:off x="2506140" y="6052606"/>
+            <a:off x="2251462" y="6052606"/>
             <a:ext cx="386240" cy="143640"/>
           </a:xfrm>
           <a:prstGeom prst="rect">
@@ -4806,8 +4806,8 @@
         </p:nvSpPr>
         <p:spPr>
           <a:xfrm>
-            <a:off x="2287608" y="6484944"/>
-            <a:ext cx="363881" cy="143640"/>
+            <a:off x="2202440" y="6484944"/>
+            <a:ext cx="337223" cy="143640"/>
           </a:xfrm>
           <a:prstGeom prst="rect">
             <a:avLst/>
@@ -4830,7 +4830,7 @@
                 </a:solidFill>
                 <a:latin typeface="Versos"/>
               </a:rPr>
-              <a:t>2,75%</a:t>
+              <a:t>3,15%</a:t>
             </a:r>
           </a:p>
         </p:txBody>
@@ -4880,8 +4880,8 @@
         </p:nvSpPr>
         <p:spPr>
           <a:xfrm>
-            <a:off x="2249100" y="6917281"/>
-            <a:ext cx="382554" cy="143640"/>
+            <a:off x="2163577" y="6917281"/>
+            <a:ext cx="383169" cy="143640"/>
           </a:xfrm>
           <a:prstGeom prst="rect">
             <a:avLst/>
@@ -4904,7 +4904,7 @@
                 </a:solidFill>
                 <a:latin typeface="Versos"/>
               </a:rPr>
-              <a:t>2,66%</a:t>
+              <a:t>3,03%</a:t>
             </a:r>
           </a:p>
         </p:txBody>
@@ -4941,7 +4941,7 @@
                 </a:solidFill>
                 <a:latin typeface="Versos"/>
               </a:rPr>
-              <a:t>BV</a:t>
+              <a:t>BRADESCO</a:t>
             </a:r>
           </a:p>
         </p:txBody>
@@ -4954,8 +4954,8 @@
         </p:nvSpPr>
         <p:spPr>
           <a:xfrm>
-            <a:off x="1883503" y="7349619"/>
-            <a:ext cx="327640" cy="143640"/>
+            <a:off x="1973986" y="7349619"/>
+            <a:ext cx="378500" cy="143640"/>
           </a:xfrm>
           <a:prstGeom prst="rect">
             <a:avLst/>
@@ -4978,7 +4978,7 @@
                 </a:solidFill>
                 <a:latin typeface="Versos"/>
               </a:rPr>
-              <a:t>1,74%</a:t>
+              <a:t>2,44%</a:t>
             </a:r>
           </a:p>
         </p:txBody>
@@ -5066,7 +5066,7 @@
         <p:spPr>
           <a:xfrm>
             <a:off x="2960448" y="8251031"/>
-            <a:ext cx="434643" cy="143640"/>
+            <a:ext cx="428377" cy="143640"/>
           </a:xfrm>
           <a:prstGeom prst="rect">
             <a:avLst/>
@@ -5089,7 +5089,7 @@
                 </a:solidFill>
                 <a:latin typeface="Versos"/>
               </a:rPr>
-              <a:t>28,18%</a:t>
+              <a:t>31,97%</a:t>
             </a:r>
           </a:p>
         </p:txBody>
@@ -5139,8 +5139,8 @@
         </p:nvSpPr>
         <p:spPr>
           <a:xfrm>
-            <a:off x="1417854" y="8515158"/>
-            <a:ext cx="353439" cy="143640"/>
+            <a:off x="1466167" y="8515158"/>
+            <a:ext cx="374201" cy="143640"/>
           </a:xfrm>
           <a:prstGeom prst="rect">
             <a:avLst/>
@@ -5163,7 +5163,7 @@
                 </a:solidFill>
                 <a:latin typeface="Versos"/>
               </a:rPr>
-              <a:t>5,51%</a:t>
+              <a:t>7,05%</a:t>
             </a:r>
           </a:p>
         </p:txBody>
@@ -5200,7 +5200,7 @@
                 </a:solidFill>
                 <a:latin typeface="Versos"/>
               </a:rPr>
-              <a:t>AA-</a:t>
+              <a:t>A</a:t>
             </a:r>
           </a:p>
         </p:txBody>
@@ -5213,8 +5213,8 @@
         </p:nvSpPr>
         <p:spPr>
           <a:xfrm>
-            <a:off x="1356429" y="8779286"/>
-            <a:ext cx="402088" cy="143640"/>
+            <a:off x="1390213" y="8779286"/>
+            <a:ext cx="383660" cy="143640"/>
           </a:xfrm>
           <a:prstGeom prst="rect">
             <a:avLst/>
@@ -5237,7 +5237,7 @@
                 </a:solidFill>
                 <a:latin typeface="Versos"/>
               </a:rPr>
-              <a:t>4,60%</a:t>
+              <a:t>5,79%</a:t>
             </a:r>
           </a:p>
         </p:txBody>
@@ -5274,7 +5274,7 @@
                 </a:solidFill>
                 <a:latin typeface="Versos"/>
               </a:rPr>
-              <a:t>A</a:t>
+              <a:t>AA-</a:t>
             </a:r>
           </a:p>
         </p:txBody>
@@ -5287,8 +5287,8 @@
         </p:nvSpPr>
         <p:spPr>
           <a:xfrm>
-            <a:off x="1348515" y="9043413"/>
-            <a:ext cx="401228" cy="143640"/>
+            <a:off x="1335403" y="9043413"/>
+            <a:ext cx="387591" cy="143640"/>
           </a:xfrm>
           <a:prstGeom prst="rect">
             <a:avLst/>
@@ -5311,7 +5311,7 @@
                 </a:solidFill>
                 <a:latin typeface="Versos"/>
               </a:rPr>
-              <a:t>4,49%</a:t>
+              <a:t>4,87%</a:t>
             </a:r>
           </a:p>
         </p:txBody>
@@ -5361,7 +5361,7 @@
         </p:nvSpPr>
         <p:spPr>
           <a:xfrm>
-            <a:off x="1316621" y="9307541"/>
+            <a:off x="1284255" y="9307541"/>
             <a:ext cx="394717" cy="143640"/>
           </a:xfrm>
           <a:prstGeom prst="rect">
@@ -5435,8 +5435,8 @@
         </p:nvSpPr>
         <p:spPr>
           <a:xfrm>
-            <a:off x="1220585" y="9571668"/>
-            <a:ext cx="354176" cy="143640"/>
+            <a:off x="1258858" y="9571668"/>
+            <a:ext cx="393979" cy="143640"/>
           </a:xfrm>
           <a:prstGeom prst="rect">
             <a:avLst/>
@@ -5459,7 +5459,7 @@
                 </a:solidFill>
                 <a:latin typeface="Versos"/>
               </a:rPr>
-              <a:t>2,61%</a:t>
+              <a:t>3,59%</a:t>
             </a:r>
           </a:p>
         </p:txBody>
@@ -5509,7 +5509,7 @@
         </p:nvSpPr>
         <p:spPr>
           <a:xfrm>
-            <a:off x="1087813" y="9835796"/>
+            <a:off x="1082497" y="9835796"/>
             <a:ext cx="398648" cy="143640"/>
           </a:xfrm>
           <a:prstGeom prst="rect">
@@ -5621,7 +5621,7 @@
         <p:spPr>
           <a:xfrm>
             <a:off x="6752497" y="5518209"/>
-            <a:ext cx="410933" cy="143640"/>
+            <a:ext cx="433414" cy="143640"/>
           </a:xfrm>
           <a:prstGeom prst="rect">
             <a:avLst/>
@@ -5644,7 +5644,7 @@
                 </a:solidFill>
                 <a:latin typeface="Versos"/>
               </a:rPr>
-              <a:t>27,13%</a:t>
+              <a:t>30,12%</a:t>
             </a:r>
           </a:p>
         </p:txBody>
@@ -5694,8 +5694,8 @@
         </p:nvSpPr>
         <p:spPr>
           <a:xfrm>
-            <a:off x="6578145" y="5746426"/>
-            <a:ext cx="472603" cy="143640"/>
+            <a:off x="6644176" y="5746426"/>
+            <a:ext cx="447911" cy="143640"/>
           </a:xfrm>
           <a:prstGeom prst="rect">
             <a:avLst/>
@@ -5718,7 +5718,7 @@
                 </a:solidFill>
                 <a:latin typeface="Versos"/>
               </a:rPr>
-              <a:t>23,38%</a:t>
+              <a:t>27,54%</a:t>
             </a:r>
           </a:p>
         </p:txBody>
@@ -5768,8 +5768,8 @@
         </p:nvSpPr>
         <p:spPr>
           <a:xfrm>
-            <a:off x="6066427" y="5974526"/>
-            <a:ext cx="446068" cy="143640"/>
+            <a:off x="6031935" y="5974526"/>
+            <a:ext cx="434889" cy="143640"/>
           </a:xfrm>
           <a:prstGeom prst="rect">
             <a:avLst/>
@@ -5792,7 +5792,7 @@
                 </a:solidFill>
                 <a:latin typeface="Versos"/>
               </a:rPr>
-              <a:t>12,40%</a:t>
+              <a:t>12,95%</a:t>
             </a:r>
           </a:p>
         </p:txBody>
@@ -5842,8 +5842,8 @@
         </p:nvSpPr>
         <p:spPr>
           <a:xfrm>
-            <a:off x="5744418" y="6202743"/>
-            <a:ext cx="397051" cy="143640"/>
+            <a:off x="5775249" y="6202743"/>
+            <a:ext cx="395699" cy="143640"/>
           </a:xfrm>
           <a:prstGeom prst="rect">
             <a:avLst/>
@@ -5866,7 +5866,7 @@
                 </a:solidFill>
                 <a:latin typeface="Versos"/>
               </a:rPr>
-              <a:t>5,49%</a:t>
+              <a:t>6,83%</a:t>
             </a:r>
           </a:p>
         </p:txBody>
@@ -5916,7 +5916,7 @@
         </p:nvSpPr>
         <p:spPr>
           <a:xfrm>
-            <a:off x="5640232" y="6430843"/>
+            <a:off x="5624994" y="6430843"/>
             <a:ext cx="386486" cy="143640"/>
           </a:xfrm>
           <a:prstGeom prst="rect">
@@ -5990,8 +5990,8 @@
         </p:nvSpPr>
         <p:spPr>
           <a:xfrm>
-            <a:off x="5607039" y="6659060"/>
-            <a:ext cx="388451" cy="143640"/>
+            <a:off x="5619678" y="6659060"/>
+            <a:ext cx="350122" cy="143640"/>
           </a:xfrm>
           <a:prstGeom prst="rect">
             <a:avLst/>
@@ -6014,7 +6014,7 @@
                 </a:solidFill>
                 <a:latin typeface="Versos"/>
               </a:rPr>
-              <a:t>2,54%</a:t>
+              <a:t>3,12%</a:t>
             </a:r>
           </a:p>
         </p:txBody>
@@ -6051,7 +6051,7 @@
                 </a:solidFill>
                 <a:latin typeface="Versos"/>
               </a:rPr>
-              <a:t>Assistência médica</a:t>
+              <a:t>Locação de veículos</a:t>
             </a:r>
           </a:p>
         </p:txBody>
@@ -6064,8 +6064,8 @@
         </p:nvSpPr>
         <p:spPr>
           <a:xfrm>
-            <a:off x="5582351" y="6887160"/>
-            <a:ext cx="356756" cy="143640"/>
+            <a:off x="5604204" y="6887160"/>
+            <a:ext cx="383169" cy="143640"/>
           </a:xfrm>
           <a:prstGeom prst="rect">
             <a:avLst/>
@@ -6088,7 +6088,7 @@
                 </a:solidFill>
                 <a:latin typeface="Versos"/>
               </a:rPr>
-              <a:t>2,01%</a:t>
+              <a:t>2,76%</a:t>
             </a:r>
           </a:p>
         </p:txBody>
@@ -6125,7 +6125,7 @@
                 </a:solidFill>
                 <a:latin typeface="Versos"/>
               </a:rPr>
-              <a:t>Locação de veículos</a:t>
+              <a:t>Transporte e Logística</a:t>
             </a:r>
           </a:p>
         </p:txBody>
@@ -6138,8 +6138,8 @@
         </p:nvSpPr>
         <p:spPr>
           <a:xfrm>
-            <a:off x="5579043" y="7115377"/>
-            <a:ext cx="358230" cy="143640"/>
+            <a:off x="5585304" y="7115377"/>
+            <a:ext cx="357124" cy="143640"/>
           </a:xfrm>
           <a:prstGeom prst="rect">
             <a:avLst/>
@@ -6162,7 +6162,7 @@
                 </a:solidFill>
                 <a:latin typeface="Versos"/>
               </a:rPr>
-              <a:t>1,94%</a:t>
+              <a:t>2,31%</a:t>
             </a:r>
           </a:p>
         </p:txBody>
@@ -6199,7 +6199,7 @@
                 </a:solidFill>
                 <a:latin typeface="Versos"/>
               </a:rPr>
-              <a:t>Transporte e Logística</a:t>
+              <a:t>Assistência médica</a:t>
             </a:r>
           </a:p>
         </p:txBody>
@@ -6212,8 +6212,8 @@
         </p:nvSpPr>
         <p:spPr>
           <a:xfrm>
-            <a:off x="5577508" y="7343476"/>
-            <a:ext cx="323955" cy="143640"/>
+            <a:off x="5575618" y="7343476"/>
+            <a:ext cx="397296" cy="143640"/>
           </a:xfrm>
           <a:prstGeom prst="rect">
             <a:avLst/>
@@ -6236,7 +6236,7 @@
                 </a:solidFill>
                 <a:latin typeface="Versos"/>
               </a:rPr>
-              <a:t>1,91%</a:t>
+              <a:t>2,08%</a:t>
             </a:r>
           </a:p>
         </p:txBody>
@@ -6286,8 +6286,8 @@
         </p:nvSpPr>
         <p:spPr>
           <a:xfrm>
-            <a:off x="5574791" y="7571694"/>
-            <a:ext cx="360196" cy="143640"/>
+            <a:off x="5566404" y="7571694"/>
+            <a:ext cx="366461" cy="143640"/>
           </a:xfrm>
           <a:prstGeom prst="rect">
             <a:avLst/>
@@ -6310,7 +6310,7 @@
                 </a:solidFill>
                 <a:latin typeface="Versos"/>
               </a:rPr>
-              <a:t>1,85%</a:t>
+              <a:t>1,86%</a:t>
             </a:r>
           </a:p>
         </p:txBody>
@@ -6360,7 +6360,7 @@
         </p:nvSpPr>
         <p:spPr>
           <a:xfrm>
-            <a:off x="5561679" y="7799793"/>
+            <a:off x="5554355" y="7799793"/>
             <a:ext cx="348525" cy="143640"/>
           </a:xfrm>
           <a:prstGeom prst="rect">
@@ -6434,7 +6434,7 @@
         </p:nvSpPr>
         <p:spPr>
           <a:xfrm>
-            <a:off x="5541598" y="8028011"/>
+            <a:off x="5536400" y="8028011"/>
             <a:ext cx="318058" cy="143640"/>
           </a:xfrm>
           <a:prstGeom prst="rect">
@@ -6508,7 +6508,7 @@
         </p:nvSpPr>
         <p:spPr>
           <a:xfrm>
-            <a:off x="5535101" y="8256228"/>
+            <a:off x="5530494" y="8256228"/>
             <a:ext cx="369778" cy="143640"/>
           </a:xfrm>
           <a:prstGeom prst="rect">
@@ -6582,7 +6582,7 @@
         </p:nvSpPr>
         <p:spPr>
           <a:xfrm>
-            <a:off x="5529549" y="8484446"/>
+            <a:off x="5525651" y="8484446"/>
             <a:ext cx="401473" cy="143640"/>
           </a:xfrm>
           <a:prstGeom prst="rect">
@@ -6656,7 +6656,7 @@
         </p:nvSpPr>
         <p:spPr>
           <a:xfrm>
-            <a:off x="5515846" y="8712663"/>
+            <a:off x="5513130" y="8712663"/>
             <a:ext cx="396682" cy="143640"/>
           </a:xfrm>
           <a:prstGeom prst="rect">
@@ -6730,7 +6730,7 @@
         </p:nvSpPr>
         <p:spPr>
           <a:xfrm>
-            <a:off x="5513956" y="8940881"/>
+            <a:off x="5511358" y="8940881"/>
             <a:ext cx="391031" cy="143640"/>
           </a:xfrm>
           <a:prstGeom prst="rect">
@@ -6804,7 +6804,7 @@
         </p:nvSpPr>
         <p:spPr>
           <a:xfrm>
-            <a:off x="5509704" y="9169098"/>
+            <a:off x="5507460" y="9169098"/>
             <a:ext cx="394594" cy="143640"/>
           </a:xfrm>
           <a:prstGeom prst="rect">
@@ -6865,7 +6865,7 @@
                 </a:solidFill>
                 <a:latin typeface="Versos"/>
               </a:rPr>
-              <a:t>Outros</a:t>
+              <a:t>Alimentos e bebidas</a:t>
             </a:r>
           </a:p>
         </p:txBody>
@@ -6878,8 +6878,8 @@
         </p:nvSpPr>
         <p:spPr>
           <a:xfrm>
-            <a:off x="5499191" y="9397316"/>
-            <a:ext cx="392137" cy="143640"/>
+            <a:off x="5506042" y="9397316"/>
+            <a:ext cx="395331" cy="143640"/>
           </a:xfrm>
           <a:prstGeom prst="rect">
             <a:avLst/>
@@ -6902,7 +6902,7 @@
                 </a:solidFill>
                 <a:latin typeface="Versos"/>
               </a:rPr>
-              <a:t>0,23%</a:t>
+              <a:t>0,42%</a:t>
             </a:r>
           </a:p>
         </p:txBody>
@@ -6939,7 +6939,7 @@
                 </a:solidFill>
                 <a:latin typeface="Versos"/>
               </a:rPr>
-              <a:t>Distribuição</a:t>
+              <a:t>Outros</a:t>
             </a:r>
           </a:p>
         </p:txBody>
@@ -6952,8 +6952,8 @@
         </p:nvSpPr>
         <p:spPr>
           <a:xfrm>
-            <a:off x="5498010" y="9625533"/>
-            <a:ext cx="351965" cy="143640"/>
+            <a:off x="5498128" y="9625533"/>
+            <a:ext cx="392137" cy="143640"/>
           </a:xfrm>
           <a:prstGeom prst="rect">
             <a:avLst/>
@@ -6976,7 +6976,7 @@
                 </a:solidFill>
                 <a:latin typeface="Versos"/>
               </a:rPr>
-              <a:t>0,14%</a:t>
+              <a:t>0,23%</a:t>
             </a:r>
           </a:p>
         </p:txBody>
@@ -7013,7 +7013,7 @@
                 </a:solidFill>
                 <a:latin typeface="Versos"/>
               </a:rPr>
-              <a:t>Têxtil e Calçados</a:t>
+              <a:t>Distribuição</a:t>
             </a:r>
           </a:p>
         </p:txBody>
@@ -7027,7 +7027,7 @@
         <p:spPr>
           <a:xfrm>
             <a:off x="5498010" y="9853751"/>
-            <a:ext cx="355036" cy="143640"/>
+            <a:ext cx="351965" cy="143640"/>
           </a:xfrm>
           <a:prstGeom prst="rect">
             <a:avLst/>
@@ -7050,7 +7050,7 @@
                 </a:solidFill>
                 <a:latin typeface="Versos"/>
               </a:rPr>
-              <a:t>0,13%</a:t>
+              <a:t>0,14%</a:t>
             </a:r>
           </a:p>
         </p:txBody>

--- a/AutomaTivio/saida/2026-09/pptx/Tivio Institucional 15 - Relatório de Gestão - Setembro 2026.pptx
+++ b/AutomaTivio/saida/2026-09/pptx/Tivio Institucional 15 - Relatório de Gestão - Setembro 2026.pptx
@@ -14668,7 +14668,7 @@
                 </a:solidFill>
                 <a:latin typeface="Versos"/>
               </a:rPr>
-              <a:t>27/02/2002</a:t>
+              <a:t>02/04/2001</a:t>
             </a:r>
           </a:p>
         </p:txBody>
